--- a/catalog/samples/delta_bars_totals.pptx
+++ b/catalog/samples/delta_bars_totals.pptx
@@ -1919,7 +1919,7 @@
           </a:p>
           <a:p>
             <a:r>
-              <a:t>  "template_sha256": "667f119a95bf16129193755f8614cec33792335e7711a2b2225b63c5209c018e"</a:t>
+              <a:t>  "template_sha256": "35287da3f879ecff9e3bd367a1c44f7ff65d7aa6394b9c2b7b0a09bad3938935"</a:t>
             </a:r>
           </a:p>
           <a:p>
